--- a/relatorio_psicologo_sao_paulo.pptx
+++ b/relatorio_psicologo_sao_paulo.pptx
@@ -3314,7 +3314,7 @@
                     <a:lstStyle/>
                     <a:p>
                       <a:r>
-                        <a:t>Google Maps</a:t>
+                        <a:t>LCS Psicologia</a:t>
                       </a:r>
                     </a:p>
                   </a:txBody>
@@ -3326,7 +3326,7 @@
                     <a:lstStyle/>
                     <a:p>
                       <a:r>
-                        <a:t>SEM SITE (OPORTUNIDA</a:t>
+                        <a:t>SITE ATIVO 📱</a:t>
                       </a:r>
                     </a:p>
                   </a:txBody>
@@ -3338,7 +3338,7 @@
                     <a:lstStyle/>
                     <a:p>
                       <a:r>
-                        <a:t>WhatsApp no Maps 📍</a:t>
+                        <a:t>(SA) 98877-6655</a:t>
                       </a:r>
                     </a:p>
                   </a:txBody>
@@ -3364,7 +3364,7 @@
                     <a:lstStyle/>
                     <a:p>
                       <a:r>
-                        <a:t>LCS Psicologia</a:t>
+                        <a:t>Psiclogo So Paulo Laura C</a:t>
                       </a:r>
                     </a:p>
                   </a:txBody>
@@ -3388,7 +3388,7 @@
                     <a:lstStyle/>
                     <a:p>
                       <a:r>
-                        <a:t>6002771800</a:t>
+                        <a:t>(SA) 98877-6655</a:t>
                       </a:r>
                     </a:p>
                   </a:txBody>
@@ -3414,7 +3414,7 @@
                     <a:lstStyle/>
                     <a:p>
                       <a:r>
-                        <a:t>Cidades no estado de Sao </a:t>
+                        <a:t>Psicloga Maristela Vallim</a:t>
                       </a:r>
                     </a:p>
                   </a:txBody>
@@ -3438,7 +3438,7 @@
                     <a:lstStyle/>
                     <a:p>
                       <a:r>
-                        <a:t>WhatsApp no Maps 📍</a:t>
+                        <a:t>(SA) 98877-6655</a:t>
                       </a:r>
                     </a:p>
                   </a:txBody>
@@ -3464,7 +3464,7 @@
                     <a:lstStyle/>
                     <a:p>
                       <a:r>
-                        <a:t>Yandex Maps: search for p</a:t>
+                        <a:t>Vagas de Psiclogo em So P</a:t>
                       </a:r>
                     </a:p>
                   </a:txBody>
@@ -3488,7 +3488,7 @@
                     <a:lstStyle/>
                     <a:p>
                       <a:r>
-                        <a:t>WhatsApp no Maps 📍</a:t>
+                        <a:t>(SA) 98877-6655</a:t>
                       </a:r>
                     </a:p>
                   </a:txBody>
@@ -3538,7 +3538,7 @@
                     <a:lstStyle/>
                     <a:p>
                       <a:r>
-                        <a:t>WhatsApp no Maps 📍</a:t>
+                        <a:t>(SA) 98877-6655</a:t>
                       </a:r>
                     </a:p>
                   </a:txBody>
@@ -3564,7 +3564,7 @@
                     <a:lstStyle/>
                     <a:p>
                       <a:r>
-                        <a:t>So Paulo</a:t>
+                        <a:t>Consultrio de psiclogo em</a:t>
                       </a:r>
                     </a:p>
                   </a:txBody>
@@ -3576,7 +3576,7 @@
                     <a:lstStyle/>
                     <a:p>
                       <a:r>
-                        <a:t>SEM SITE (OPORTUNIDA</a:t>
+                        <a:t>SITE ATIVO 📱</a:t>
                       </a:r>
                     </a:p>
                   </a:txBody>
@@ -3588,7 +3588,7 @@
                     <a:lstStyle/>
                     <a:p>
                       <a:r>
-                        <a:t>WhatsApp no Maps 📍</a:t>
+                        <a:t>(11) 91454-0891</a:t>
                       </a:r>
                     </a:p>
                   </a:txBody>
@@ -3614,7 +3614,7 @@
                     <a:lstStyle/>
                     <a:p>
                       <a:r>
-                        <a:t>Psiclogo, Conselheiro, Te</a:t>
+                        <a:t>Gustavo Cicilini</a:t>
                       </a:r>
                     </a:p>
                   </a:txBody>
@@ -3638,7 +3638,7 @@
                     <a:lstStyle/>
                     <a:p>
                       <a:r>
-                        <a:t>WhatsApp no Maps 📍</a:t>
+                        <a:t>(SA) 98877-6655</a:t>
                       </a:r>
                     </a:p>
                   </a:txBody>
@@ -3664,7 +3664,7 @@
                     <a:lstStyle/>
                     <a:p>
                       <a:r>
-                        <a:t>Consultrio de psiclogo em</a:t>
+                        <a:t>Psicloga Brooklin</a:t>
                       </a:r>
                     </a:p>
                   </a:txBody>
@@ -3688,7 +3688,7 @@
                     <a:lstStyle/>
                     <a:p>
                       <a:r>
-                        <a:t>WhatsApp no Maps 📍</a:t>
+                        <a:t>(SA) 98877-6655</a:t>
                       </a:r>
                     </a:p>
                   </a:txBody>
@@ -3714,7 +3714,7 @@
                     <a:lstStyle/>
                     <a:p>
                       <a:r>
-                        <a:t>Gustavo Cicilini</a:t>
+                        <a:t>Psiclogo Clnico Particula</a:t>
                       </a:r>
                     </a:p>
                   </a:txBody>
@@ -3738,7 +3738,7 @@
                     <a:lstStyle/>
                     <a:p>
                       <a:r>
-                        <a:t>WhatsApp no Maps 📍</a:t>
+                        <a:t>(SA) 98877-6655</a:t>
                       </a:r>
                     </a:p>
                   </a:txBody>
@@ -3764,7 +3764,7 @@
                     <a:lstStyle/>
                     <a:p>
                       <a:r>
-                        <a:t>Terapia online com psiclo</a:t>
+                        <a:t>Portal</a:t>
                       </a:r>
                     </a:p>
                   </a:txBody>
@@ -3788,7 +3788,7 @@
                     <a:lstStyle/>
                     <a:p>
                       <a:r>
-                        <a:t>WhatsApp no Maps 📍</a:t>
+                        <a:t>(11) 4502-4752</a:t>
                       </a:r>
                     </a:p>
                   </a:txBody>

--- a/relatorio_psicologo_sao_paulo.pptx
+++ b/relatorio_psicologo_sao_paulo.pptx
@@ -3338,7 +3338,7 @@
                     <a:lstStyle/>
                     <a:p>
                       <a:r>
-                        <a:t>(SA) 98877-6655</a:t>
+                        <a:t>(11) 96862-0525</a:t>
                       </a:r>
                     </a:p>
                   </a:txBody>
@@ -3564,7 +3564,7 @@
                     <a:lstStyle/>
                     <a:p>
                       <a:r>
-                        <a:t>Consultrio de psiclogo em</a:t>
+                        <a:t>Psiclogo, Conselheiro, Te</a:t>
                       </a:r>
                     </a:p>
                   </a:txBody>
@@ -3588,7 +3588,7 @@
                     <a:lstStyle/>
                     <a:p>
                       <a:r>
-                        <a:t>(11) 91454-0891</a:t>
+                        <a:t>(SA) 98877-6655</a:t>
                       </a:r>
                     </a:p>
                   </a:txBody>
@@ -3614,7 +3614,7 @@
                     <a:lstStyle/>
                     <a:p>
                       <a:r>
-                        <a:t>Gustavo Cicilini</a:t>
+                        <a:t>Consultrio de psiclogo em</a:t>
                       </a:r>
                     </a:p>
                   </a:txBody>
@@ -3638,7 +3638,7 @@
                     <a:lstStyle/>
                     <a:p>
                       <a:r>
-                        <a:t>(SA) 98877-6655</a:t>
+                        <a:t>(11) 97092-5229</a:t>
                       </a:r>
                     </a:p>
                   </a:txBody>
@@ -3688,7 +3688,7 @@
                     <a:lstStyle/>
                     <a:p>
                       <a:r>
-                        <a:t>(SA) 98877-6655</a:t>
+                        <a:t>(11) 5102-3493</a:t>
                       </a:r>
                     </a:p>
                   </a:txBody>
@@ -3788,7 +3788,7 @@
                     <a:lstStyle/>
                     <a:p>
                       <a:r>
-                        <a:t>(11) 4502-4752</a:t>
+                        <a:t>(SA) 98877-6655</a:t>
                       </a:r>
                     </a:p>
                   </a:txBody>

--- a/relatorio_psicologo_sao_paulo.pptx
+++ b/relatorio_psicologo_sao_paulo.pptx
@@ -3364,7 +3364,7 @@
                     <a:lstStyle/>
                     <a:p>
                       <a:r>
-                        <a:t>Psiclogo So Paulo Laura C</a:t>
+                        <a:t>CNPJ 46.506.509/0001-01</a:t>
                       </a:r>
                     </a:p>
                   </a:txBody>
@@ -3376,7 +3376,7 @@
                     <a:lstStyle/>
                     <a:p>
                       <a:r>
-                        <a:t>SITE ATIVO 📱</a:t>
+                        <a:t>SITE FORA DO AR / LI</a:t>
                       </a:r>
                     </a:p>
                   </a:txBody>
@@ -3414,7 +3414,7 @@
                     <a:lstStyle/>
                     <a:p>
                       <a:r>
-                        <a:t>Psicloga Maristela Vallim</a:t>
+                        <a:t>Psiclogo em So Paulo</a:t>
                       </a:r>
                     </a:p>
                   </a:txBody>
@@ -3464,7 +3464,7 @@
                     <a:lstStyle/>
                     <a:p>
                       <a:r>
-                        <a:t>Vagas de Psiclogo em So P</a:t>
+                        <a:t>Psicloga Aline Quirosa, S</a:t>
                       </a:r>
                     </a:p>
                   </a:txBody>
@@ -3488,7 +3488,7 @@
                     <a:lstStyle/>
                     <a:p>
                       <a:r>
-                        <a:t>(SA) 98877-6655</a:t>
+                        <a:t>(52) 8293-9100</a:t>
                       </a:r>
                     </a:p>
                   </a:txBody>
@@ -3514,7 +3514,7 @@
                     <a:lstStyle/>
                     <a:p>
                       <a:r>
-                        <a:t>Psiclogo em So Paulo</a:t>
+                        <a:t>Psicologo felipe faccioli</a:t>
                       </a:r>
                     </a:p>
                   </a:txBody>
@@ -3538,7 +3538,7 @@
                     <a:lstStyle/>
                     <a:p>
                       <a:r>
-                        <a:t>(SA) 98877-6655</a:t>
+                        <a:t>(41) 9788-0145</a:t>
                       </a:r>
                     </a:p>
                   </a:txBody>
@@ -3664,7 +3664,7 @@
                     <a:lstStyle/>
                     <a:p>
                       <a:r>
-                        <a:t>Psicloga Brooklin</a:t>
+                        <a:t>Gustavo Cicilini</a:t>
                       </a:r>
                     </a:p>
                   </a:txBody>
@@ -3688,7 +3688,7 @@
                     <a:lstStyle/>
                     <a:p>
                       <a:r>
-                        <a:t>(11) 5102-3493</a:t>
+                        <a:t>(SA) 98877-6655</a:t>
                       </a:r>
                     </a:p>
                   </a:txBody>
@@ -3738,7 +3738,7 @@
                     <a:lstStyle/>
                     <a:p>
                       <a:r>
-                        <a:t>(SA) 98877-6655</a:t>
+                        <a:t>(11) 99333-8208</a:t>
                       </a:r>
                     </a:p>
                   </a:txBody>
@@ -3764,7 +3764,7 @@
                     <a:lstStyle/>
                     <a:p>
                       <a:r>
-                        <a:t>Portal</a:t>
+                        <a:t>Psicologo Transpessoal Em</a:t>
                       </a:r>
                     </a:p>
                   </a:txBody>
@@ -3788,7 +3788,7 @@
                     <a:lstStyle/>
                     <a:p>
                       <a:r>
-                        <a:t>(SA) 98877-6655</a:t>
+                        <a:t>(11) 2368-1764</a:t>
                       </a:r>
                     </a:p>
                   </a:txBody>

--- a/relatorio_psicologo_sao_paulo.pptx
+++ b/relatorio_psicologo_sao_paulo.pptx
@@ -3213,7 +3213,7 @@
                 <a:gridCol w="2057400"/>
                 <a:gridCol w="2057400"/>
               </a:tblGrid>
-              <a:tr h="415636">
+              <a:tr h="508000">
                 <a:tc>
                   <a:txBody>
                     <a:bodyPr/>
@@ -3307,14 +3307,14 @@
                   </a:tcPr>
                 </a:tc>
               </a:tr>
-              <a:tr h="415636">
+              <a:tr h="508000">
                 <a:tc>
                   <a:txBody>
                     <a:bodyPr/>
                     <a:lstStyle/>
                     <a:p>
                       <a:r>
-                        <a:t>LCS Psicologia</a:t>
+                        <a:t>Elaine Ferreira Psicloga </a:t>
                       </a:r>
                     </a:p>
                   </a:txBody>
@@ -3338,7 +3338,7 @@
                     <a:lstStyle/>
                     <a:p>
                       <a:r>
-                        <a:t>(11) 96862-0525</a:t>
+                        <a:t>(11) 97622-2228</a:t>
                       </a:r>
                     </a:p>
                   </a:txBody>
@@ -3357,64 +3357,14 @@
                   <a:tcPr/>
                 </a:tc>
               </a:tr>
-              <a:tr h="415636">
+              <a:tr h="508000">
                 <a:tc>
                   <a:txBody>
                     <a:bodyPr/>
                     <a:lstStyle/>
                     <a:p>
                       <a:r>
-                        <a:t>CNPJ 46.506.509/0001-01</a:t>
-                      </a:r>
-                    </a:p>
-                  </a:txBody>
-                  <a:tcPr/>
-                </a:tc>
-                <a:tc>
-                  <a:txBody>
-                    <a:bodyPr/>
-                    <a:lstStyle/>
-                    <a:p>
-                      <a:r>
-                        <a:t>SITE FORA DO AR / LI</a:t>
-                      </a:r>
-                    </a:p>
-                  </a:txBody>
-                  <a:tcPr/>
-                </a:tc>
-                <a:tc>
-                  <a:txBody>
-                    <a:bodyPr/>
-                    <a:lstStyle/>
-                    <a:p>
-                      <a:r>
-                        <a:t>(SA) 98877-6655</a:t>
-                      </a:r>
-                    </a:p>
-                  </a:txBody>
-                  <a:tcPr/>
-                </a:tc>
-                <a:tc>
-                  <a:txBody>
-                    <a:bodyPr/>
-                    <a:lstStyle/>
-                    <a:p>
-                      <a:r>
-                        <a:t>Enviar 1ª Msg (100% Grátis)</a:t>
-                      </a:r>
-                    </a:p>
-                  </a:txBody>
-                  <a:tcPr/>
-                </a:tc>
-              </a:tr>
-              <a:tr h="415636">
-                <a:tc>
-                  <a:txBody>
-                    <a:bodyPr/>
-                    <a:lstStyle/>
-                    <a:p>
-                      <a:r>
-                        <a:t>Psiclogo em So Paulo</a:t>
+                        <a:t>Equilibrio Psicologia Cli</a:t>
                       </a:r>
                     </a:p>
                   </a:txBody>
@@ -3438,7 +3388,7 @@
                     <a:lstStyle/>
                     <a:p>
                       <a:r>
-                        <a:t>(SA) 98877-6655</a:t>
+                        <a:t>(71) 94400-0105</a:t>
                       </a:r>
                     </a:p>
                   </a:txBody>
@@ -3457,14 +3407,64 @@
                   <a:tcPr/>
                 </a:tc>
               </a:tr>
-              <a:tr h="415636">
+              <a:tr h="508000">
                 <a:tc>
                   <a:txBody>
                     <a:bodyPr/>
                     <a:lstStyle/>
                     <a:p>
                       <a:r>
-                        <a:t>Psicloga Aline Quirosa, S</a:t>
+                        <a:t>Clnica de Psiclogo</a:t>
+                      </a:r>
+                    </a:p>
+                  </a:txBody>
+                  <a:tcPr/>
+                </a:tc>
+                <a:tc>
+                  <a:txBody>
+                    <a:bodyPr/>
+                    <a:lstStyle/>
+                    <a:p>
+                      <a:r>
+                        <a:t>SITE FORA DO AR (ERR</a:t>
+                      </a:r>
+                    </a:p>
+                  </a:txBody>
+                  <a:tcPr/>
+                </a:tc>
+                <a:tc>
+                  <a:txBody>
+                    <a:bodyPr/>
+                    <a:lstStyle/>
+                    <a:p>
+                      <a:r>
+                        <a:t>(11) 98215-4403</a:t>
+                      </a:r>
+                    </a:p>
+                  </a:txBody>
+                  <a:tcPr/>
+                </a:tc>
+                <a:tc>
+                  <a:txBody>
+                    <a:bodyPr/>
+                    <a:lstStyle/>
+                    <a:p>
+                      <a:r>
+                        <a:t>Enviar 1ª Msg (100% Grátis)</a:t>
+                      </a:r>
+                    </a:p>
+                  </a:txBody>
+                  <a:tcPr/>
+                </a:tc>
+              </a:tr>
+              <a:tr h="508000">
+                <a:tc>
+                  <a:txBody>
+                    <a:bodyPr/>
+                    <a:lstStyle/>
+                    <a:p>
+                      <a:r>
+                        <a:t>Somente</a:t>
                       </a:r>
                     </a:p>
                   </a:txBody>
@@ -3488,7 +3488,7 @@
                     <a:lstStyle/>
                     <a:p>
                       <a:r>
-                        <a:t>(52) 8293-9100</a:t>
+                        <a:t>(11) 93776-1645</a:t>
                       </a:r>
                     </a:p>
                   </a:txBody>
@@ -3507,14 +3507,14 @@
                   <a:tcPr/>
                 </a:tc>
               </a:tr>
-              <a:tr h="415636">
+              <a:tr h="508000">
                 <a:tc>
                   <a:txBody>
                     <a:bodyPr/>
                     <a:lstStyle/>
                     <a:p>
                       <a:r>
-                        <a:t>Psicologo felipe faccioli</a:t>
+                        <a:t>Psicloga Responde Pergunt</a:t>
                       </a:r>
                     </a:p>
                   </a:txBody>
@@ -3538,7 +3538,7 @@
                     <a:lstStyle/>
                     <a:p>
                       <a:r>
-                        <a:t>(41) 9788-0145</a:t>
+                        <a:t>(11) 99787-4512</a:t>
                       </a:r>
                     </a:p>
                   </a:txBody>
@@ -3557,14 +3557,64 @@
                   <a:tcPr/>
                 </a:tc>
               </a:tr>
-              <a:tr h="415636">
+              <a:tr h="508000">
                 <a:tc>
                   <a:txBody>
                     <a:bodyPr/>
                     <a:lstStyle/>
                     <a:p>
                       <a:r>
-                        <a:t>Psiclogo, Conselheiro, Te</a:t>
+                        <a:t>Psicloga Terapia de Casal</a:t>
+                      </a:r>
+                    </a:p>
+                  </a:txBody>
+                  <a:tcPr/>
+                </a:tc>
+                <a:tc>
+                  <a:txBody>
+                    <a:bodyPr/>
+                    <a:lstStyle/>
+                    <a:p>
+                      <a:r>
+                        <a:t>SEM SITE (OPORTUNIDA</a:t>
+                      </a:r>
+                    </a:p>
+                  </a:txBody>
+                  <a:tcPr/>
+                </a:tc>
+                <a:tc>
+                  <a:txBody>
+                    <a:bodyPr/>
+                    <a:lstStyle/>
+                    <a:p>
+                      <a:r>
+                        <a:t>(11) 95091-1931</a:t>
+                      </a:r>
+                    </a:p>
+                  </a:txBody>
+                  <a:tcPr/>
+                </a:tc>
+                <a:tc>
+                  <a:txBody>
+                    <a:bodyPr/>
+                    <a:lstStyle/>
+                    <a:p>
+                      <a:r>
+                        <a:t>Enviar 1ª Msg (100% Grátis)</a:t>
+                      </a:r>
+                    </a:p>
+                  </a:txBody>
+                  <a:tcPr/>
+                </a:tc>
+              </a:tr>
+              <a:tr h="508000">
+                <a:tc>
+                  <a:txBody>
+                    <a:bodyPr/>
+                    <a:lstStyle/>
+                    <a:p>
+                      <a:r>
+                        <a:t>Nossos Contatos</a:t>
                       </a:r>
                     </a:p>
                   </a:txBody>
@@ -3588,7 +3638,7 @@
                     <a:lstStyle/>
                     <a:p>
                       <a:r>
-                        <a:t>(SA) 98877-6655</a:t>
+                        <a:t>(11) 98204-5631</a:t>
                       </a:r>
                     </a:p>
                   </a:txBody>
@@ -3607,14 +3657,14 @@
                   <a:tcPr/>
                 </a:tc>
               </a:tr>
-              <a:tr h="415636">
+              <a:tr h="508000">
                 <a:tc>
                   <a:txBody>
                     <a:bodyPr/>
                     <a:lstStyle/>
                     <a:p>
                       <a:r>
-                        <a:t>Consultrio de psiclogo em</a:t>
+                        <a:t>Psicloga Sp Maristela Val</a:t>
                       </a:r>
                     </a:p>
                   </a:txBody>
@@ -3638,157 +3688,7 @@
                     <a:lstStyle/>
                     <a:p>
                       <a:r>
-                        <a:t>(11) 97092-5229</a:t>
-                      </a:r>
-                    </a:p>
-                  </a:txBody>
-                  <a:tcPr/>
-                </a:tc>
-                <a:tc>
-                  <a:txBody>
-                    <a:bodyPr/>
-                    <a:lstStyle/>
-                    <a:p>
-                      <a:r>
-                        <a:t>Enviar 1ª Msg (100% Grátis)</a:t>
-                      </a:r>
-                    </a:p>
-                  </a:txBody>
-                  <a:tcPr/>
-                </a:tc>
-              </a:tr>
-              <a:tr h="415636">
-                <a:tc>
-                  <a:txBody>
-                    <a:bodyPr/>
-                    <a:lstStyle/>
-                    <a:p>
-                      <a:r>
-                        <a:t>Gustavo Cicilini</a:t>
-                      </a:r>
-                    </a:p>
-                  </a:txBody>
-                  <a:tcPr/>
-                </a:tc>
-                <a:tc>
-                  <a:txBody>
-                    <a:bodyPr/>
-                    <a:lstStyle/>
-                    <a:p>
-                      <a:r>
-                        <a:t>SITE ATIVO 📱</a:t>
-                      </a:r>
-                    </a:p>
-                  </a:txBody>
-                  <a:tcPr/>
-                </a:tc>
-                <a:tc>
-                  <a:txBody>
-                    <a:bodyPr/>
-                    <a:lstStyle/>
-                    <a:p>
-                      <a:r>
-                        <a:t>(SA) 98877-6655</a:t>
-                      </a:r>
-                    </a:p>
-                  </a:txBody>
-                  <a:tcPr/>
-                </a:tc>
-                <a:tc>
-                  <a:txBody>
-                    <a:bodyPr/>
-                    <a:lstStyle/>
-                    <a:p>
-                      <a:r>
-                        <a:t>Enviar 1ª Msg (100% Grátis)</a:t>
-                      </a:r>
-                    </a:p>
-                  </a:txBody>
-                  <a:tcPr/>
-                </a:tc>
-              </a:tr>
-              <a:tr h="415636">
-                <a:tc>
-                  <a:txBody>
-                    <a:bodyPr/>
-                    <a:lstStyle/>
-                    <a:p>
-                      <a:r>
-                        <a:t>Psiclogo Clnico Particula</a:t>
-                      </a:r>
-                    </a:p>
-                  </a:txBody>
-                  <a:tcPr/>
-                </a:tc>
-                <a:tc>
-                  <a:txBody>
-                    <a:bodyPr/>
-                    <a:lstStyle/>
-                    <a:p>
-                      <a:r>
-                        <a:t>SITE ATIVO 📱</a:t>
-                      </a:r>
-                    </a:p>
-                  </a:txBody>
-                  <a:tcPr/>
-                </a:tc>
-                <a:tc>
-                  <a:txBody>
-                    <a:bodyPr/>
-                    <a:lstStyle/>
-                    <a:p>
-                      <a:r>
-                        <a:t>(11) 99333-8208</a:t>
-                      </a:r>
-                    </a:p>
-                  </a:txBody>
-                  <a:tcPr/>
-                </a:tc>
-                <a:tc>
-                  <a:txBody>
-                    <a:bodyPr/>
-                    <a:lstStyle/>
-                    <a:p>
-                      <a:r>
-                        <a:t>Enviar 1ª Msg (100% Grátis)</a:t>
-                      </a:r>
-                    </a:p>
-                  </a:txBody>
-                  <a:tcPr/>
-                </a:tc>
-              </a:tr>
-              <a:tr h="415640">
-                <a:tc>
-                  <a:txBody>
-                    <a:bodyPr/>
-                    <a:lstStyle/>
-                    <a:p>
-                      <a:r>
-                        <a:t>Psicologo Transpessoal Em</a:t>
-                      </a:r>
-                    </a:p>
-                  </a:txBody>
-                  <a:tcPr/>
-                </a:tc>
-                <a:tc>
-                  <a:txBody>
-                    <a:bodyPr/>
-                    <a:lstStyle/>
-                    <a:p>
-                      <a:r>
-                        <a:t>SITE ATIVO 📱</a:t>
-                      </a:r>
-                    </a:p>
-                  </a:txBody>
-                  <a:tcPr/>
-                </a:tc>
-                <a:tc>
-                  <a:txBody>
-                    <a:bodyPr/>
-                    <a:lstStyle/>
-                    <a:p>
-                      <a:r>
-                        <a:t>(11) 2368-1764</a:t>
+                        <a:t>(11) 95091-1931</a:t>
                       </a:r>
                     </a:p>
                   </a:txBody>
